--- a/IKT_SMH/11evfolyam_BiztonsagosCsalad/Biztonságos Család az Interneten (1).pptx
+++ b/IKT_SMH/11evfolyam_BiztonsagosCsalad/Biztonságos Család az Interneten (1).pptx
@@ -17,7 +17,6 @@
     <p:sldId id="265" r:id="rId11"/>
     <p:sldId id="266" r:id="rId12"/>
     <p:sldId id="267" r:id="rId13"/>
-    <p:sldId id="268" r:id="rId14"/>
   </p:sldIdLst>
   <p:sldSz cx="12192000" cy="6858000"/>
   <p:notesSz cx="6858000" cy="9144000"/>
@@ -316,7 +315,7 @@
           <a:p>
             <a:fld id="{5BCAD085-E8A6-8845-BD4E-CB4CCA059FC4}" type="datetimeFigureOut">
               <a:rPr lang="en-US" smtClean="0"/>
-              <a:t>9/11/2026</a:t>
+              <a:t>9/18/2026</a:t>
             </a:fld>
             <a:endParaRPr lang="en-US"/>
           </a:p>
@@ -486,7 +485,7 @@
           <a:p>
             <a:fld id="{5BCAD085-E8A6-8845-BD4E-CB4CCA059FC4}" type="datetimeFigureOut">
               <a:rPr lang="en-US" smtClean="0"/>
-              <a:t>9/11/2026</a:t>
+              <a:t>9/18/2026</a:t>
             </a:fld>
             <a:endParaRPr lang="en-US"/>
           </a:p>
@@ -666,7 +665,7 @@
           <a:p>
             <a:fld id="{5BCAD085-E8A6-8845-BD4E-CB4CCA059FC4}" type="datetimeFigureOut">
               <a:rPr lang="en-US" smtClean="0"/>
-              <a:t>9/11/2026</a:t>
+              <a:t>9/18/2026</a:t>
             </a:fld>
             <a:endParaRPr lang="en-US"/>
           </a:p>
@@ -836,7 +835,7 @@
           <a:p>
             <a:fld id="{5BCAD085-E8A6-8845-BD4E-CB4CCA059FC4}" type="datetimeFigureOut">
               <a:rPr lang="en-US" smtClean="0"/>
-              <a:t>9/11/2026</a:t>
+              <a:t>9/18/2026</a:t>
             </a:fld>
             <a:endParaRPr lang="en-US"/>
           </a:p>
@@ -1082,7 +1081,7 @@
           <a:p>
             <a:fld id="{5BCAD085-E8A6-8845-BD4E-CB4CCA059FC4}" type="datetimeFigureOut">
               <a:rPr lang="en-US" smtClean="0"/>
-              <a:t>9/11/2026</a:t>
+              <a:t>9/18/2026</a:t>
             </a:fld>
             <a:endParaRPr lang="en-US"/>
           </a:p>
@@ -1370,7 +1369,7 @@
           <a:p>
             <a:fld id="{5BCAD085-E8A6-8845-BD4E-CB4CCA059FC4}" type="datetimeFigureOut">
               <a:rPr lang="en-US" smtClean="0"/>
-              <a:t>9/11/2026</a:t>
+              <a:t>9/18/2026</a:t>
             </a:fld>
             <a:endParaRPr lang="en-US"/>
           </a:p>
@@ -1792,7 +1791,7 @@
           <a:p>
             <a:fld id="{5BCAD085-E8A6-8845-BD4E-CB4CCA059FC4}" type="datetimeFigureOut">
               <a:rPr lang="en-US" smtClean="0"/>
-              <a:t>9/11/2026</a:t>
+              <a:t>9/18/2026</a:t>
             </a:fld>
             <a:endParaRPr lang="en-US"/>
           </a:p>
@@ -1910,7 +1909,7 @@
           <a:p>
             <a:fld id="{5BCAD085-E8A6-8845-BD4E-CB4CCA059FC4}" type="datetimeFigureOut">
               <a:rPr lang="en-US" smtClean="0"/>
-              <a:t>9/11/2026</a:t>
+              <a:t>9/18/2026</a:t>
             </a:fld>
             <a:endParaRPr lang="en-US"/>
           </a:p>
@@ -2005,7 +2004,7 @@
           <a:p>
             <a:fld id="{5BCAD085-E8A6-8845-BD4E-CB4CCA059FC4}" type="datetimeFigureOut">
               <a:rPr lang="en-US" smtClean="0"/>
-              <a:t>9/11/2026</a:t>
+              <a:t>9/18/2026</a:t>
             </a:fld>
             <a:endParaRPr lang="en-US"/>
           </a:p>
@@ -2282,7 +2281,7 @@
           <a:p>
             <a:fld id="{5BCAD085-E8A6-8845-BD4E-CB4CCA059FC4}" type="datetimeFigureOut">
               <a:rPr lang="en-US" smtClean="0"/>
-              <a:t>9/11/2026</a:t>
+              <a:t>9/18/2026</a:t>
             </a:fld>
             <a:endParaRPr lang="en-US"/>
           </a:p>
@@ -2535,7 +2534,7 @@
           <a:p>
             <a:fld id="{5BCAD085-E8A6-8845-BD4E-CB4CCA059FC4}" type="datetimeFigureOut">
               <a:rPr lang="en-US" smtClean="0"/>
-              <a:t>9/11/2026</a:t>
+              <a:t>9/18/2026</a:t>
             </a:fld>
             <a:endParaRPr lang="en-US"/>
           </a:p>
@@ -2748,7 +2747,7 @@
           <a:p>
             <a:fld id="{5BCAD085-E8A6-8845-BD4E-CB4CCA059FC4}" type="datetimeFigureOut">
               <a:rPr lang="en-US" smtClean="0"/>
-              <a:t>9/11/2026</a:t>
+              <a:t>9/18/2026</a:t>
             </a:fld>
             <a:endParaRPr lang="en-US"/>
           </a:p>
@@ -4511,742 +4510,6 @@
               </a:rPr>
               <a:t>Nemzetközi Gyermekmentő Szolgálat (SAFTI) tananyagai</a:t>
             </a:r>
-          </a:p>
-        </p:txBody>
-      </p:sp>
-    </p:spTree>
-  </p:cSld>
-  <p:clrMapOvr>
-    <a:masterClrMapping/>
-  </p:clrMapOvr>
-</p:sld>
-</file>
-
-<file path=ppt/slides/slide13.xml><?xml version="1.0" encoding="utf-8"?>
-<p:sld xmlns:a="http://schemas.openxmlformats.org/drawingml/2006/main" xmlns:r="http://schemas.openxmlformats.org/officeDocument/2006/relationships" xmlns:p="http://schemas.openxmlformats.org/presentationml/2006/main">
-  <p:cSld>
-    <p:bg>
-      <p:bgPr>
-        <a:solidFill>
-          <a:srgbClr val="FFFFFF"/>
-        </a:solidFill>
-        <a:effectLst/>
-      </p:bgPr>
-    </p:bg>
-    <p:spTree>
-      <p:nvGrpSpPr>
-        <p:cNvPr id="1" name=""/>
-        <p:cNvGrpSpPr/>
-        <p:nvPr/>
-      </p:nvGrpSpPr>
-      <p:grpSpPr>
-        <a:xfrm>
-          <a:off x="0" y="0"/>
-          <a:ext cx="0" cy="0"/>
-          <a:chOff x="0" y="0"/>
-          <a:chExt cx="0" cy="0"/>
-        </a:xfrm>
-      </p:grpSpPr>
-      <p:pic>
-        <p:nvPicPr>
-          <p:cNvPr id="2" name="Picture 1" descr="image.png"/>
-          <p:cNvPicPr>
-            <a:picLocks noChangeAspect="1"/>
-          </p:cNvPicPr>
-          <p:nvPr/>
-        </p:nvPicPr>
-        <p:blipFill>
-          <a:blip r:embed="rId2"/>
-          <a:stretch>
-            <a:fillRect/>
-          </a:stretch>
-        </p:blipFill>
-        <p:spPr>
-          <a:xfrm>
-            <a:off x="0" y="0"/>
-            <a:ext cx="12192000" cy="6858000"/>
-          </a:xfrm>
-          <a:prstGeom prst="rect">
-            <a:avLst/>
-          </a:prstGeom>
-        </p:spPr>
-      </p:pic>
-      <p:sp>
-        <p:nvSpPr>
-          <p:cNvPr id="3" name="Rectangle 2"/>
-          <p:cNvSpPr/>
-          <p:nvPr/>
-        </p:nvSpPr>
-        <p:spPr>
-          <a:xfrm>
-            <a:off x="1309687" y="2719387"/>
-            <a:ext cx="9572625" cy="771525"/>
-          </a:xfrm>
-          <a:prstGeom prst="rect">
-            <a:avLst/>
-          </a:prstGeom>
-          <a:noFill/>
-          <a:ln>
-            <a:noFill/>
-          </a:ln>
-          <a:effectLst/>
-        </p:spPr>
-        <p:style>
-          <a:lnRef idx="1">
-            <a:schemeClr val="accent1"/>
-          </a:lnRef>
-          <a:fillRef idx="3">
-            <a:schemeClr val="accent1"/>
-          </a:fillRef>
-          <a:effectRef idx="2">
-            <a:schemeClr val="accent1"/>
-          </a:effectRef>
-          <a:fontRef idx="minor">
-            <a:schemeClr val="lt1"/>
-          </a:fontRef>
-        </p:style>
-        <p:txBody>
-          <a:bodyPr rtlCol="0" anchor="ctr"/>
-          <a:lstStyle/>
-          <a:p>
-            <a:pPr algn="ctr"/>
-            <a:endParaRPr/>
-          </a:p>
-        </p:txBody>
-      </p:sp>
-      <p:sp>
-        <p:nvSpPr>
-          <p:cNvPr id="4" name="Rectangle 3"/>
-          <p:cNvSpPr/>
-          <p:nvPr/>
-        </p:nvSpPr>
-        <p:spPr>
-          <a:xfrm>
-            <a:off x="1309687" y="3490912"/>
-            <a:ext cx="9572625" cy="771525"/>
-          </a:xfrm>
-          <a:prstGeom prst="rect">
-            <a:avLst/>
-          </a:prstGeom>
-          <a:noFill/>
-          <a:ln>
-            <a:noFill/>
-          </a:ln>
-          <a:effectLst/>
-        </p:spPr>
-        <p:style>
-          <a:lnRef idx="1">
-            <a:schemeClr val="accent1"/>
-          </a:lnRef>
-          <a:fillRef idx="3">
-            <a:schemeClr val="accent1"/>
-          </a:fillRef>
-          <a:effectRef idx="2">
-            <a:schemeClr val="accent1"/>
-          </a:effectRef>
-          <a:fontRef idx="minor">
-            <a:schemeClr val="lt1"/>
-          </a:fontRef>
-        </p:style>
-        <p:txBody>
-          <a:bodyPr rtlCol="0" anchor="ctr"/>
-          <a:lstStyle/>
-          <a:p>
-            <a:pPr algn="ctr"/>
-            <a:endParaRPr/>
-          </a:p>
-        </p:txBody>
-      </p:sp>
-      <p:sp>
-        <p:nvSpPr>
-          <p:cNvPr id="5" name="Rectangle 4"/>
-          <p:cNvSpPr/>
-          <p:nvPr/>
-        </p:nvSpPr>
-        <p:spPr>
-          <a:xfrm>
-            <a:off x="1309687" y="3481387"/>
-            <a:ext cx="9572625" cy="9525"/>
-          </a:xfrm>
-          <a:prstGeom prst="rect">
-            <a:avLst/>
-          </a:prstGeom>
-          <a:solidFill>
-            <a:srgbClr val="757575"/>
-          </a:solidFill>
-          <a:ln>
-            <a:noFill/>
-          </a:ln>
-          <a:effectLst/>
-        </p:spPr>
-        <p:style>
-          <a:lnRef idx="1">
-            <a:schemeClr val="accent1"/>
-          </a:lnRef>
-          <a:fillRef idx="3">
-            <a:schemeClr val="accent1"/>
-          </a:fillRef>
-          <a:effectRef idx="2">
-            <a:schemeClr val="accent1"/>
-          </a:effectRef>
-          <a:fontRef idx="minor">
-            <a:schemeClr val="lt1"/>
-          </a:fontRef>
-        </p:style>
-        <p:txBody>
-          <a:bodyPr rtlCol="0" anchor="ctr"/>
-          <a:lstStyle/>
-          <a:p>
-            <a:pPr algn="ctr"/>
-            <a:endParaRPr/>
-          </a:p>
-        </p:txBody>
-      </p:sp>
-      <p:sp>
-        <p:nvSpPr>
-          <p:cNvPr id="6" name="Rectangle 5"/>
-          <p:cNvSpPr/>
-          <p:nvPr/>
-        </p:nvSpPr>
-        <p:spPr>
-          <a:xfrm>
-            <a:off x="1309687" y="3481387"/>
-            <a:ext cx="9572625" cy="9525"/>
-          </a:xfrm>
-          <a:prstGeom prst="rect">
-            <a:avLst/>
-          </a:prstGeom>
-          <a:solidFill>
-            <a:srgbClr val="757575"/>
-          </a:solidFill>
-          <a:ln>
-            <a:noFill/>
-          </a:ln>
-          <a:effectLst/>
-        </p:spPr>
-        <p:style>
-          <a:lnRef idx="1">
-            <a:schemeClr val="accent1"/>
-          </a:lnRef>
-          <a:fillRef idx="3">
-            <a:schemeClr val="accent1"/>
-          </a:fillRef>
-          <a:effectRef idx="2">
-            <a:schemeClr val="accent1"/>
-          </a:effectRef>
-          <a:fontRef idx="minor">
-            <a:schemeClr val="lt1"/>
-          </a:fontRef>
-        </p:style>
-        <p:txBody>
-          <a:bodyPr rtlCol="0" anchor="ctr"/>
-          <a:lstStyle/>
-          <a:p>
-            <a:pPr algn="ctr"/>
-            <a:endParaRPr/>
-          </a:p>
-        </p:txBody>
-      </p:sp>
-      <p:sp>
-        <p:nvSpPr>
-          <p:cNvPr id="7" name="Rectangle 6"/>
-          <p:cNvSpPr/>
-          <p:nvPr/>
-        </p:nvSpPr>
-        <p:spPr>
-          <a:xfrm>
-            <a:off x="1309687" y="4252912"/>
-            <a:ext cx="9572625" cy="9525"/>
-          </a:xfrm>
-          <a:prstGeom prst="rect">
-            <a:avLst/>
-          </a:prstGeom>
-          <a:solidFill>
-            <a:srgbClr val="757575"/>
-          </a:solidFill>
-          <a:ln>
-            <a:noFill/>
-          </a:ln>
-          <a:effectLst/>
-        </p:spPr>
-        <p:style>
-          <a:lnRef idx="1">
-            <a:schemeClr val="accent1"/>
-          </a:lnRef>
-          <a:fillRef idx="3">
-            <a:schemeClr val="accent1"/>
-          </a:fillRef>
-          <a:effectRef idx="2">
-            <a:schemeClr val="accent1"/>
-          </a:effectRef>
-          <a:fontRef idx="minor">
-            <a:schemeClr val="lt1"/>
-          </a:fontRef>
-        </p:style>
-        <p:txBody>
-          <a:bodyPr rtlCol="0" anchor="ctr"/>
-          <a:lstStyle/>
-          <a:p>
-            <a:pPr algn="ctr"/>
-            <a:endParaRPr/>
-          </a:p>
-        </p:txBody>
-      </p:sp>
-      <p:sp>
-        <p:nvSpPr>
-          <p:cNvPr id="8" name="Rectangle 7"/>
-          <p:cNvSpPr/>
-          <p:nvPr/>
-        </p:nvSpPr>
-        <p:spPr>
-          <a:xfrm>
-            <a:off x="1309687" y="4252912"/>
-            <a:ext cx="9572625" cy="9525"/>
-          </a:xfrm>
-          <a:prstGeom prst="rect">
-            <a:avLst/>
-          </a:prstGeom>
-          <a:solidFill>
-            <a:srgbClr val="757575"/>
-          </a:solidFill>
-          <a:ln>
-            <a:noFill/>
-          </a:ln>
-          <a:effectLst/>
-        </p:spPr>
-        <p:style>
-          <a:lnRef idx="1">
-            <a:schemeClr val="accent1"/>
-          </a:lnRef>
-          <a:fillRef idx="3">
-            <a:schemeClr val="accent1"/>
-          </a:fillRef>
-          <a:effectRef idx="2">
-            <a:schemeClr val="accent1"/>
-          </a:effectRef>
-          <a:fontRef idx="minor">
-            <a:schemeClr val="lt1"/>
-          </a:fontRef>
-        </p:style>
-        <p:txBody>
-          <a:bodyPr rtlCol="0" anchor="ctr"/>
-          <a:lstStyle/>
-          <a:p>
-            <a:pPr algn="ctr"/>
-            <a:endParaRPr/>
-          </a:p>
-        </p:txBody>
-      </p:sp>
-      <p:pic>
-        <p:nvPicPr>
-          <p:cNvPr id="9" name="Picture 8" descr="image.png"/>
-          <p:cNvPicPr>
-            <a:picLocks noChangeAspect="1"/>
-          </p:cNvPicPr>
-          <p:nvPr/>
-        </p:nvPicPr>
-        <p:blipFill>
-          <a:blip r:embed="rId3"/>
-          <a:stretch>
-            <a:fillRect/>
-          </a:stretch>
-        </p:blipFill>
-        <p:spPr>
-          <a:xfrm>
-            <a:off x="1309687" y="2862262"/>
-            <a:ext cx="857250" cy="476250"/>
-          </a:xfrm>
-          <a:prstGeom prst="rect">
-            <a:avLst/>
-          </a:prstGeom>
-        </p:spPr>
-      </p:pic>
-      <p:sp>
-        <p:nvSpPr>
-          <p:cNvPr id="10" name="TextBox 9"/>
-          <p:cNvSpPr txBox="1"/>
-          <p:nvPr/>
-        </p:nvSpPr>
-        <p:spPr>
-          <a:xfrm>
-            <a:off x="2405062" y="2869406"/>
-            <a:ext cx="8477250" cy="185737"/>
-          </a:xfrm>
-          <a:prstGeom prst="rect">
-            <a:avLst/>
-          </a:prstGeom>
-          <a:noFill/>
-        </p:spPr>
-        <p:txBody>
-          <a:bodyPr wrap="square" lIns="0" tIns="0" rIns="0" bIns="0" anchor="t">
-            <a:spAutoFit/>
-          </a:bodyPr>
-          <a:lstStyle/>
-          <a:p>
-            <a:pPr algn="l">
-              <a:lnSpc>
-                <a:spcPts val="1462"/>
-              </a:lnSpc>
-            </a:pPr>
-            <a:r>
-              <a:rPr sz="975" b="0" i="0" u="none">
-                <a:solidFill>
-                  <a:srgbClr val="334155"/>
-                </a:solidFill>
-                <a:latin typeface="Lato"/>
-              </a:rPr>
-              <a:t>https://thinktrix.com/wp-content/uploads/2024/12/red-backlit-keyboard-and-code-on-laptop-screen-create-a-tech-focused-ambiance.-943096-scaled.jpg</a:t>
-            </a:r>
-          </a:p>
-        </p:txBody>
-      </p:sp>
-      <p:sp>
-        <p:nvSpPr>
-          <p:cNvPr id="11" name="TextBox 10"/>
-          <p:cNvSpPr txBox="1"/>
-          <p:nvPr/>
-        </p:nvSpPr>
-        <p:spPr>
-          <a:xfrm>
-            <a:off x="2405062" y="3102768"/>
-            <a:ext cx="8477250" cy="228600"/>
-          </a:xfrm>
-          <a:prstGeom prst="rect">
-            <a:avLst/>
-          </a:prstGeom>
-          <a:noFill/>
-        </p:spPr>
-        <p:txBody>
-          <a:bodyPr wrap="square" lIns="0" tIns="0" rIns="0" bIns="0" anchor="t">
-            <a:spAutoFit/>
-          </a:bodyPr>
-          <a:lstStyle/>
-          <a:p>
-            <a:pPr algn="l">
-              <a:lnSpc>
-                <a:spcPts val="1800"/>
-              </a:lnSpc>
-            </a:pPr>
-            <a:r>
-              <a:rPr sz="1200" b="0" i="0" u="none">
-                <a:solidFill>
-                  <a:srgbClr val="334155"/>
-                </a:solidFill>
-                <a:latin typeface="Lato"/>
-              </a:rPr>
-              <a:t>Source: </a:t>
-            </a:r>
-            <a:r>
-              <a:rPr sz="1200" b="0" i="0" u="none">
-                <a:solidFill>
-                  <a:srgbClr val="4F46E5"/>
-                </a:solidFill>
-                <a:latin typeface="Lato"/>
-              </a:rPr>
-              <a:t>thinktrix.com</a:t>
-            </a:r>
-          </a:p>
-        </p:txBody>
-      </p:sp>
-      <p:pic>
-        <p:nvPicPr>
-          <p:cNvPr id="12" name="Picture 11" descr="image.png"/>
-          <p:cNvPicPr>
-            <a:picLocks noChangeAspect="1"/>
-          </p:cNvPicPr>
-          <p:nvPr/>
-        </p:nvPicPr>
-        <p:blipFill>
-          <a:blip r:embed="rId4"/>
-          <a:stretch>
-            <a:fillRect/>
-          </a:stretch>
-        </p:blipFill>
-        <p:spPr>
-          <a:xfrm>
-            <a:off x="1309687" y="3633787"/>
-            <a:ext cx="857250" cy="476250"/>
-          </a:xfrm>
-          <a:prstGeom prst="rect">
-            <a:avLst/>
-          </a:prstGeom>
-        </p:spPr>
-      </p:pic>
-      <p:sp>
-        <p:nvSpPr>
-          <p:cNvPr id="13" name="TextBox 12"/>
-          <p:cNvSpPr txBox="1"/>
-          <p:nvPr/>
-        </p:nvSpPr>
-        <p:spPr>
-          <a:xfrm>
-            <a:off x="2405062" y="3640931"/>
-            <a:ext cx="8477250" cy="185737"/>
-          </a:xfrm>
-          <a:prstGeom prst="rect">
-            <a:avLst/>
-          </a:prstGeom>
-          <a:noFill/>
-        </p:spPr>
-        <p:txBody>
-          <a:bodyPr wrap="square" lIns="0" tIns="0" rIns="0" bIns="0" anchor="t">
-            <a:spAutoFit/>
-          </a:bodyPr>
-          <a:lstStyle/>
-          <a:p>
-            <a:pPr algn="l">
-              <a:lnSpc>
-                <a:spcPts val="1462"/>
-              </a:lnSpc>
-            </a:pPr>
-            <a:r>
-              <a:rPr sz="975" b="0" i="0" u="none">
-                <a:solidFill>
-                  <a:srgbClr val="334155"/>
-                </a:solidFill>
-                <a:latin typeface="Lato"/>
-              </a:rPr>
-              <a:t>https://www.schoemans.com.na/wp-content/uploads/2024/08/schoemans-news-cyber-security-protect-your-family-featured-image-jpg.webp</a:t>
-            </a:r>
-          </a:p>
-        </p:txBody>
-      </p:sp>
-      <p:sp>
-        <p:nvSpPr>
-          <p:cNvPr id="14" name="TextBox 13"/>
-          <p:cNvSpPr txBox="1"/>
-          <p:nvPr/>
-        </p:nvSpPr>
-        <p:spPr>
-          <a:xfrm>
-            <a:off x="2405062" y="3874293"/>
-            <a:ext cx="8477250" cy="228600"/>
-          </a:xfrm>
-          <a:prstGeom prst="rect">
-            <a:avLst/>
-          </a:prstGeom>
-          <a:noFill/>
-        </p:spPr>
-        <p:txBody>
-          <a:bodyPr wrap="square" lIns="0" tIns="0" rIns="0" bIns="0" anchor="t">
-            <a:spAutoFit/>
-          </a:bodyPr>
-          <a:lstStyle/>
-          <a:p>
-            <a:pPr algn="l">
-              <a:lnSpc>
-                <a:spcPts val="1800"/>
-              </a:lnSpc>
-            </a:pPr>
-            <a:r>
-              <a:rPr sz="1200" b="0" i="0" u="none">
-                <a:solidFill>
-                  <a:srgbClr val="334155"/>
-                </a:solidFill>
-                <a:latin typeface="Lato"/>
-              </a:rPr>
-              <a:t>Source: </a:t>
-            </a:r>
-            <a:r>
-              <a:rPr sz="1200" b="0" i="0" u="none">
-                <a:solidFill>
-                  <a:srgbClr val="4F46E5"/>
-                </a:solidFill>
-                <a:latin typeface="Lato"/>
-              </a:rPr>
-              <a:t>www.schoemans.com.na</a:t>
-            </a:r>
-          </a:p>
-        </p:txBody>
-      </p:sp>
-      <p:pic>
-        <p:nvPicPr>
-          <p:cNvPr id="15" name="Picture 14" descr="image.png"/>
-          <p:cNvPicPr>
-            <a:picLocks noChangeAspect="1"/>
-          </p:cNvPicPr>
-          <p:nvPr/>
-        </p:nvPicPr>
-        <p:blipFill>
-          <a:blip r:embed="rId5"/>
-          <a:stretch>
-            <a:fillRect/>
-          </a:stretch>
-        </p:blipFill>
-        <p:spPr>
-          <a:xfrm>
-            <a:off x="1309687" y="4405312"/>
-            <a:ext cx="857250" cy="476250"/>
-          </a:xfrm>
-          <a:prstGeom prst="rect">
-            <a:avLst/>
-          </a:prstGeom>
-        </p:spPr>
-      </p:pic>
-      <p:sp>
-        <p:nvSpPr>
-          <p:cNvPr id="16" name="TextBox 15"/>
-          <p:cNvSpPr txBox="1"/>
-          <p:nvPr/>
-        </p:nvSpPr>
-        <p:spPr>
-          <a:xfrm>
-            <a:off x="2405062" y="4412456"/>
-            <a:ext cx="8477250" cy="185737"/>
-          </a:xfrm>
-          <a:prstGeom prst="rect">
-            <a:avLst/>
-          </a:prstGeom>
-          <a:noFill/>
-        </p:spPr>
-        <p:txBody>
-          <a:bodyPr wrap="square" lIns="0" tIns="0" rIns="0" bIns="0" anchor="t">
-            <a:spAutoFit/>
-          </a:bodyPr>
-          <a:lstStyle/>
-          <a:p>
-            <a:pPr algn="l">
-              <a:lnSpc>
-                <a:spcPts val="1462"/>
-              </a:lnSpc>
-            </a:pPr>
-            <a:r>
-              <a:rPr sz="975" b="0" i="0" u="none">
-                <a:solidFill>
-                  <a:srgbClr val="334155"/>
-                </a:solidFill>
-                <a:latin typeface="Lato"/>
-              </a:rPr>
-              <a:t>https://www.eschoolnews.com/files/2025/02/project-based-learning.jpeg</a:t>
-            </a:r>
-          </a:p>
-        </p:txBody>
-      </p:sp>
-      <p:sp>
-        <p:nvSpPr>
-          <p:cNvPr id="17" name="TextBox 16"/>
-          <p:cNvSpPr txBox="1"/>
-          <p:nvPr/>
-        </p:nvSpPr>
-        <p:spPr>
-          <a:xfrm>
-            <a:off x="2405062" y="4645818"/>
-            <a:ext cx="8477250" cy="228600"/>
-          </a:xfrm>
-          <a:prstGeom prst="rect">
-            <a:avLst/>
-          </a:prstGeom>
-          <a:noFill/>
-        </p:spPr>
-        <p:txBody>
-          <a:bodyPr wrap="square" lIns="0" tIns="0" rIns="0" bIns="0" anchor="t">
-            <a:spAutoFit/>
-          </a:bodyPr>
-          <a:lstStyle/>
-          <a:p>
-            <a:pPr algn="l">
-              <a:lnSpc>
-                <a:spcPts val="1800"/>
-              </a:lnSpc>
-            </a:pPr>
-            <a:r>
-              <a:rPr sz="1200" b="0" i="0" u="none" dirty="0">
-                <a:solidFill>
-                  <a:srgbClr val="334155"/>
-                </a:solidFill>
-                <a:latin typeface="Lato"/>
-              </a:rPr>
-              <a:t>Source: </a:t>
-            </a:r>
-            <a:r>
-              <a:rPr sz="1200" b="0" i="0" u="none" dirty="0">
-                <a:solidFill>
-                  <a:srgbClr val="4F46E5"/>
-                </a:solidFill>
-                <a:latin typeface="Lato"/>
-              </a:rPr>
-              <a:t>www.eschoolnews.com</a:t>
-            </a:r>
-          </a:p>
-        </p:txBody>
-      </p:sp>
-      <p:sp>
-        <p:nvSpPr>
-          <p:cNvPr id="18" name="TextBox 17"/>
-          <p:cNvSpPr txBox="1"/>
-          <p:nvPr/>
-        </p:nvSpPr>
-        <p:spPr>
-          <a:xfrm>
-            <a:off x="476250" y="476250"/>
-            <a:ext cx="11715750" cy="552450"/>
-          </a:xfrm>
-          <a:prstGeom prst="rect">
-            <a:avLst/>
-          </a:prstGeom>
-          <a:noFill/>
-        </p:spPr>
-        <p:txBody>
-          <a:bodyPr wrap="square" lIns="0" tIns="0" rIns="0" bIns="0" anchor="t">
-            <a:spAutoFit/>
-          </a:bodyPr>
-          <a:lstStyle/>
-          <a:p>
-            <a:pPr algn="l"/>
-            <a:r>
-              <a:rPr sz="2700" b="1" i="0" u="none">
-                <a:solidFill>
-                  <a:srgbClr val="0F172A"/>
-                </a:solidFill>
-                <a:latin typeface="Poppins"/>
-              </a:rPr>
-              <a:t>Image Sources</a:t>
-            </a:r>
-          </a:p>
-        </p:txBody>
-      </p:sp>
-      <p:sp>
-        <p:nvSpPr>
-          <p:cNvPr id="19" name="Rectangle 18"/>
-          <p:cNvSpPr/>
-          <p:nvPr/>
-        </p:nvSpPr>
-        <p:spPr>
-          <a:xfrm>
-            <a:off x="476250" y="1095375"/>
-            <a:ext cx="11239500" cy="28575"/>
-          </a:xfrm>
-          <a:prstGeom prst="rect">
-            <a:avLst/>
-          </a:prstGeom>
-          <a:solidFill>
-            <a:srgbClr val="0D9488"/>
-          </a:solidFill>
-          <a:ln>
-            <a:noFill/>
-          </a:ln>
-          <a:effectLst/>
-        </p:spPr>
-        <p:style>
-          <a:lnRef idx="1">
-            <a:schemeClr val="accent1"/>
-          </a:lnRef>
-          <a:fillRef idx="3">
-            <a:schemeClr val="accent1"/>
-          </a:fillRef>
-          <a:effectRef idx="2">
-            <a:schemeClr val="accent1"/>
-          </a:effectRef>
-          <a:fontRef idx="minor">
-            <a:schemeClr val="lt1"/>
-          </a:fontRef>
-        </p:style>
-        <p:txBody>
-          <a:bodyPr rtlCol="0" anchor="ctr"/>
-          <a:lstStyle/>
-          <a:p>
-            <a:pPr algn="ctr"/>
-            <a:endParaRPr/>
           </a:p>
         </p:txBody>
       </p:sp>
